--- a/gtm/SLAM.SYSTEMS_GTM_Plan_CN.pptx
+++ b/gtm/SLAM.SYSTEMS_GTM_Plan_CN.pptx
@@ -19530,7 +19530,7 @@
                 <a:latin typeface="PingFang SC"/>
                 <a:ea typeface="PingFang SC"/>
               </a:rPr>
-              <a:t>纪要 + 片子 + 下一步。项目或经销商分轨。</a:t>
+              <a:t>纪要、片子、下一步。项目和经销商分两条跟。</a:t>
             </a:r>
           </a:p>
         </p:txBody>

--- a/gtm/SLAM.SYSTEMS_GTM_Plan_CN.pptx
+++ b/gtm/SLAM.SYSTEMS_GTM_Plan_CN.pptx
@@ -16,6 +16,7 @@
     <p:sldId id="264" r:id="rId15"/>
     <p:sldId id="265" r:id="rId16"/>
     <p:sldId id="266" r:id="rId17"/>
+    <p:sldId id="267" r:id="rId18"/>
   </p:sldIdLst>
   <p:sldSz cx="12191695" cy="6858000" type="screen4x3"/>
   <p:notesSz cx="6858000" cy="9144000"/>
@@ -3450,7 +3451,7 @@
                 <a:latin typeface="PingFang SC"/>
                 <a:ea typeface="PingFang SC"/>
               </a:rPr>
-              <a:t>11 页  ·  执行版  ·  2026.09</a:t>
+              <a:t>12 页  ·  执行版  ·  2026.09</a:t>
             </a:r>
           </a:p>
         </p:txBody>
@@ -4496,7 +4497,7 @@
                 <a:latin typeface="PingFang SC"/>
                 <a:ea typeface="PingFang SC"/>
               </a:rPr>
-              <a:t>10 / 11</a:t>
+              <a:t>10 / 12</a:t>
             </a:r>
           </a:p>
         </p:txBody>
@@ -4643,7 +4644,1090 @@
                 <a:latin typeface="PingFang SC"/>
                 <a:ea typeface="PingFang SC"/>
               </a:rPr>
-              <a:t>10  /  九十天必须交出来的东西</a:t>
+              <a:t>10  /  Slam Agent</a:t>
+            </a:r>
+          </a:p>
+        </p:txBody>
+      </p:sp>
+      <p:sp>
+        <p:nvSpPr>
+          <p:cNvPr id="4" name="TextBox 3"/>
+          <p:cNvSpPr txBox="1"/>
+          <p:nvPr/>
+        </p:nvSpPr>
+        <p:spPr>
+          <a:xfrm>
+            <a:off x="566928" y="420624"/>
+            <a:ext cx="11064240" cy="384048"/>
+          </a:xfrm>
+          <a:prstGeom prst="rect">
+            <a:avLst/>
+          </a:prstGeom>
+          <a:noFill/>
+        </p:spPr>
+        <p:txBody>
+          <a:bodyPr wrap="square" anchor="t"/>
+          <a:lstStyle/>
+          <a:p>
+            <a:pPr algn="l">
+              <a:spcBef>
+                <a:spcPts val="0"/>
+              </a:spcBef>
+              <a:spcAft>
+                <a:spcPts val="0"/>
+              </a:spcAft>
+            </a:pPr>
+            <a:r>
+              <a:rPr sz="2200" b="1">
+                <a:solidFill>
+                  <a:srgbClr val="111111"/>
+                </a:solidFill>
+                <a:latin typeface="PingFang SC"/>
+                <a:ea typeface="PingFang SC"/>
+              </a:rPr>
+              <a:t>今秋仍卖项目。Agent 是 2027 的差异化叙事，不是现在的交货清单。</a:t>
+            </a:r>
+          </a:p>
+        </p:txBody>
+      </p:sp>
+      <p:sp>
+        <p:nvSpPr>
+          <p:cNvPr id="5" name="Rectangle 4"/>
+          <p:cNvSpPr/>
+          <p:nvPr/>
+        </p:nvSpPr>
+        <p:spPr>
+          <a:xfrm>
+            <a:off x="566928" y="841248"/>
+            <a:ext cx="384048" cy="38100"/>
+          </a:xfrm>
+          <a:prstGeom prst="rect">
+            <a:avLst/>
+          </a:prstGeom>
+          <a:solidFill>
+            <a:srgbClr val="FF004E"/>
+          </a:solidFill>
+          <a:ln>
+            <a:noFill/>
+          </a:ln>
+          <a:effectLst/>
+        </p:spPr>
+        <p:style>
+          <a:lnRef idx="1">
+            <a:schemeClr val="accent1"/>
+          </a:lnRef>
+          <a:fillRef idx="3">
+            <a:schemeClr val="accent1"/>
+          </a:fillRef>
+          <a:effectRef idx="2">
+            <a:schemeClr val="accent1"/>
+          </a:effectRef>
+          <a:fontRef idx="minor">
+            <a:schemeClr val="lt1"/>
+          </a:fontRef>
+        </p:style>
+        <p:txBody>
+          <a:bodyPr rtlCol="0" anchor="ctr"/>
+          <a:lstStyle/>
+          <a:p>
+            <a:pPr algn="ctr"/>
+          </a:p>
+        </p:txBody>
+      </p:sp>
+      <p:sp>
+        <p:nvSpPr>
+          <p:cNvPr id="6" name="Rectangle 5"/>
+          <p:cNvSpPr/>
+          <p:nvPr/>
+        </p:nvSpPr>
+        <p:spPr>
+          <a:xfrm>
+            <a:off x="566928" y="1078992"/>
+            <a:ext cx="2670048" cy="4160520"/>
+          </a:xfrm>
+          <a:prstGeom prst="rect">
+            <a:avLst/>
+          </a:prstGeom>
+          <a:solidFill>
+            <a:srgbClr val="F6F6F5"/>
+          </a:solidFill>
+          <a:ln>
+            <a:noFill/>
+          </a:ln>
+          <a:effectLst/>
+        </p:spPr>
+        <p:style>
+          <a:lnRef idx="1">
+            <a:schemeClr val="accent1"/>
+          </a:lnRef>
+          <a:fillRef idx="3">
+            <a:schemeClr val="accent1"/>
+          </a:fillRef>
+          <a:effectRef idx="2">
+            <a:schemeClr val="accent1"/>
+          </a:effectRef>
+          <a:fontRef idx="minor">
+            <a:schemeClr val="lt1"/>
+          </a:fontRef>
+        </p:style>
+        <p:txBody>
+          <a:bodyPr rtlCol="0" anchor="ctr"/>
+          <a:lstStyle/>
+          <a:p>
+            <a:pPr algn="ctr"/>
+          </a:p>
+        </p:txBody>
+      </p:sp>
+      <p:sp>
+        <p:nvSpPr>
+          <p:cNvPr id="7" name="TextBox 6"/>
+          <p:cNvSpPr txBox="1"/>
+          <p:nvPr/>
+        </p:nvSpPr>
+        <p:spPr>
+          <a:xfrm>
+            <a:off x="713232" y="1225296"/>
+            <a:ext cx="2377440" cy="365760"/>
+          </a:xfrm>
+          <a:prstGeom prst="rect">
+            <a:avLst/>
+          </a:prstGeom>
+          <a:noFill/>
+        </p:spPr>
+        <p:txBody>
+          <a:bodyPr wrap="square" anchor="t"/>
+          <a:lstStyle/>
+          <a:p>
+            <a:pPr algn="l">
+              <a:spcBef>
+                <a:spcPts val="0"/>
+              </a:spcBef>
+              <a:spcAft>
+                <a:spcPts val="0"/>
+              </a:spcAft>
+            </a:pPr>
+            <a:r>
+              <a:rPr sz="1600" b="1">
+                <a:solidFill>
+                  <a:srgbClr val="FF004E"/>
+                </a:solidFill>
+                <a:latin typeface="PingFang SC"/>
+                <a:ea typeface="PingFang SC"/>
+              </a:rPr>
+              <a:t>定位升级</a:t>
+            </a:r>
+          </a:p>
+        </p:txBody>
+      </p:sp>
+      <p:sp>
+        <p:nvSpPr>
+          <p:cNvPr id="8" name="TextBox 7"/>
+          <p:cNvSpPr txBox="1"/>
+          <p:nvPr/>
+        </p:nvSpPr>
+        <p:spPr>
+          <a:xfrm>
+            <a:off x="713232" y="1664208"/>
+            <a:ext cx="2377440" cy="3383280"/>
+          </a:xfrm>
+          <a:prstGeom prst="rect">
+            <a:avLst/>
+          </a:prstGeom>
+          <a:noFill/>
+        </p:spPr>
+        <p:txBody>
+          <a:bodyPr wrap="square" anchor="t"/>
+          <a:lstStyle/>
+          <a:p>
+            <a:pPr algn="l">
+              <a:spcBef>
+                <a:spcPts val="0"/>
+              </a:spcBef>
+              <a:spcAft>
+                <a:spcPts val="0"/>
+              </a:spcAft>
+            </a:pPr>
+            <a:r>
+              <a:rPr sz="1300" b="0">
+                <a:solidFill>
+                  <a:srgbClr val="6B6B6B"/>
+                </a:solidFill>
+                <a:latin typeface="PingFang SC"/>
+                <a:ea typeface="PingFang SC"/>
+              </a:rPr>
+              <a:t>从「硬件 + 软件」讲成 Slam Agent：</a:t>
+            </a:r>
+          </a:p>
+          <a:p>
+            <a:pPr algn="l">
+              <a:spcBef>
+                <a:spcPts val="0"/>
+              </a:spcBef>
+              <a:spcAft>
+                <a:spcPts val="0"/>
+              </a:spcAft>
+            </a:pPr>
+            <a:r>
+              <a:rPr sz="1300" b="0">
+                <a:solidFill>
+                  <a:srgbClr val="6B6B6B"/>
+                </a:solidFill>
+                <a:latin typeface="PingFang SC"/>
+                <a:ea typeface="PingFang SC"/>
+              </a:rPr>
+              <a:t>一场比赛的智能代理，而不只是记分屏。</a:t>
+            </a:r>
+          </a:p>
+          <a:p>
+            <a:pPr algn="l">
+              <a:spcBef>
+                <a:spcPts val="0"/>
+              </a:spcBef>
+              <a:spcAft>
+                <a:spcPts val="0"/>
+              </a:spcAft>
+            </a:pPr>
+            <a:r>
+              <a:rPr sz="1300" b="0">
+                <a:solidFill>
+                  <a:srgbClr val="6B6B6B"/>
+                </a:solidFill>
+                <a:latin typeface="PingFang SC"/>
+                <a:ea typeface="PingFang SC"/>
+              </a:rPr>
+              <a:t>用来区别同质化记分/LED 竞品。</a:t>
+            </a:r>
+          </a:p>
+        </p:txBody>
+      </p:sp>
+      <p:sp>
+        <p:nvSpPr>
+          <p:cNvPr id="9" name="Rectangle 8"/>
+          <p:cNvSpPr/>
+          <p:nvPr/>
+        </p:nvSpPr>
+        <p:spPr>
+          <a:xfrm>
+            <a:off x="3383280" y="1078992"/>
+            <a:ext cx="2670048" cy="4160520"/>
+          </a:xfrm>
+          <a:prstGeom prst="rect">
+            <a:avLst/>
+          </a:prstGeom>
+          <a:solidFill>
+            <a:srgbClr val="F6F6F5"/>
+          </a:solidFill>
+          <a:ln>
+            <a:noFill/>
+          </a:ln>
+          <a:effectLst/>
+        </p:spPr>
+        <p:style>
+          <a:lnRef idx="1">
+            <a:schemeClr val="accent1"/>
+          </a:lnRef>
+          <a:fillRef idx="3">
+            <a:schemeClr val="accent1"/>
+          </a:fillRef>
+          <a:effectRef idx="2">
+            <a:schemeClr val="accent1"/>
+          </a:effectRef>
+          <a:fontRef idx="minor">
+            <a:schemeClr val="lt1"/>
+          </a:fontRef>
+        </p:style>
+        <p:txBody>
+          <a:bodyPr rtlCol="0" anchor="ctr"/>
+          <a:lstStyle/>
+          <a:p>
+            <a:pPr algn="ctr"/>
+          </a:p>
+        </p:txBody>
+      </p:sp>
+      <p:sp>
+        <p:nvSpPr>
+          <p:cNvPr id="10" name="TextBox 9"/>
+          <p:cNvSpPr txBox="1"/>
+          <p:nvPr/>
+        </p:nvSpPr>
+        <p:spPr>
+          <a:xfrm>
+            <a:off x="3529584" y="1225296"/>
+            <a:ext cx="2377440" cy="365760"/>
+          </a:xfrm>
+          <a:prstGeom prst="rect">
+            <a:avLst/>
+          </a:prstGeom>
+          <a:noFill/>
+        </p:spPr>
+        <p:txBody>
+          <a:bodyPr wrap="square" anchor="t"/>
+          <a:lstStyle/>
+          <a:p>
+            <a:pPr algn="l">
+              <a:spcBef>
+                <a:spcPts val="0"/>
+              </a:spcBef>
+              <a:spcAft>
+                <a:spcPts val="0"/>
+              </a:spcAft>
+            </a:pPr>
+            <a:r>
+              <a:rPr sz="1600" b="1">
+                <a:solidFill>
+                  <a:srgbClr val="FF004E"/>
+                </a:solidFill>
+                <a:latin typeface="PingFang SC"/>
+                <a:ea typeface="PingFang SC"/>
+              </a:rPr>
+              <a:t>技术路径</a:t>
+            </a:r>
+          </a:p>
+        </p:txBody>
+      </p:sp>
+      <p:sp>
+        <p:nvSpPr>
+          <p:cNvPr id="11" name="TextBox 10"/>
+          <p:cNvSpPr txBox="1"/>
+          <p:nvPr/>
+        </p:nvSpPr>
+        <p:spPr>
+          <a:xfrm>
+            <a:off x="3529584" y="1664208"/>
+            <a:ext cx="2377440" cy="3383280"/>
+          </a:xfrm>
+          <a:prstGeom prst="rect">
+            <a:avLst/>
+          </a:prstGeom>
+          <a:noFill/>
+        </p:spPr>
+        <p:txBody>
+          <a:bodyPr wrap="square" anchor="t"/>
+          <a:lstStyle/>
+          <a:p>
+            <a:pPr algn="l">
+              <a:spcBef>
+                <a:spcPts val="0"/>
+              </a:spcBef>
+              <a:spcAft>
+                <a:spcPts val="0"/>
+              </a:spcAft>
+            </a:pPr>
+            <a:r>
+              <a:rPr sz="1300" b="0">
+                <a:solidFill>
+                  <a:srgbClr val="6B6B6B"/>
+                </a:solidFill>
+                <a:latin typeface="PingFang SC"/>
+                <a:ea typeface="PingFang SC"/>
+              </a:rPr>
+              <a:t>开源 Linux 网关底座。</a:t>
+            </a:r>
+          </a:p>
+          <a:p>
+            <a:pPr algn="l">
+              <a:spcBef>
+                <a:spcPts val="0"/>
+              </a:spcBef>
+              <a:spcAft>
+                <a:spcPts val="0"/>
+              </a:spcAft>
+            </a:pPr>
+            <a:r>
+              <a:rPr sz="1300" b="0">
+                <a:solidFill>
+                  <a:srgbClr val="6B6B6B"/>
+                </a:solidFill>
+                <a:latin typeface="PingFang SC"/>
+                <a:ea typeface="PingFang SC"/>
+              </a:rPr>
+              <a:t>语音切灯光 / 广告方案。</a:t>
+            </a:r>
+          </a:p>
+          <a:p>
+            <a:pPr algn="l">
+              <a:spcBef>
+                <a:spcPts val="0"/>
+              </a:spcBef>
+              <a:spcAft>
+                <a:spcPts val="0"/>
+              </a:spcAft>
+            </a:pPr>
+            <a:r>
+              <a:rPr sz="1300" b="0">
+                <a:solidFill>
+                  <a:srgbClr val="6B6B6B"/>
+                </a:solidFill>
+                <a:latin typeface="PingFang SC"/>
+                <a:ea typeface="PingFang SC"/>
+              </a:rPr>
+              <a:t>自然语言交代「下一球暂停广告」。</a:t>
+            </a:r>
+          </a:p>
+          <a:p>
+            <a:pPr algn="l">
+              <a:spcBef>
+                <a:spcPts val="0"/>
+              </a:spcBef>
+              <a:spcAft>
+                <a:spcPts val="0"/>
+              </a:spcAft>
+            </a:pPr>
+            <a:r>
+              <a:rPr sz="1300" b="0">
+                <a:solidFill>
+                  <a:srgbClr val="6B6B6B"/>
+                </a:solidFill>
+                <a:latin typeface="PingFang SC"/>
+                <a:ea typeface="PingFang SC"/>
+              </a:rPr>
+              <a:t>能演示再写进官网，不能演示就先别写。</a:t>
+            </a:r>
+          </a:p>
+        </p:txBody>
+      </p:sp>
+      <p:sp>
+        <p:nvSpPr>
+          <p:cNvPr id="12" name="Rectangle 11"/>
+          <p:cNvSpPr/>
+          <p:nvPr/>
+        </p:nvSpPr>
+        <p:spPr>
+          <a:xfrm>
+            <a:off x="6199632" y="1078992"/>
+            <a:ext cx="2670048" cy="4160520"/>
+          </a:xfrm>
+          <a:prstGeom prst="rect">
+            <a:avLst/>
+          </a:prstGeom>
+          <a:solidFill>
+            <a:srgbClr val="F6F6F5"/>
+          </a:solidFill>
+          <a:ln>
+            <a:noFill/>
+          </a:ln>
+          <a:effectLst/>
+        </p:spPr>
+        <p:style>
+          <a:lnRef idx="1">
+            <a:schemeClr val="accent1"/>
+          </a:lnRef>
+          <a:fillRef idx="3">
+            <a:schemeClr val="accent1"/>
+          </a:fillRef>
+          <a:effectRef idx="2">
+            <a:schemeClr val="accent1"/>
+          </a:effectRef>
+          <a:fontRef idx="minor">
+            <a:schemeClr val="lt1"/>
+          </a:fontRef>
+        </p:style>
+        <p:txBody>
+          <a:bodyPr rtlCol="0" anchor="ctr"/>
+          <a:lstStyle/>
+          <a:p>
+            <a:pPr algn="ctr"/>
+          </a:p>
+        </p:txBody>
+      </p:sp>
+      <p:sp>
+        <p:nvSpPr>
+          <p:cNvPr id="13" name="TextBox 12"/>
+          <p:cNvSpPr txBox="1"/>
+          <p:nvPr/>
+        </p:nvSpPr>
+        <p:spPr>
+          <a:xfrm>
+            <a:off x="6345936" y="1225296"/>
+            <a:ext cx="2377440" cy="365760"/>
+          </a:xfrm>
+          <a:prstGeom prst="rect">
+            <a:avLst/>
+          </a:prstGeom>
+          <a:noFill/>
+        </p:spPr>
+        <p:txBody>
+          <a:bodyPr wrap="square" anchor="t"/>
+          <a:lstStyle/>
+          <a:p>
+            <a:pPr algn="l">
+              <a:spcBef>
+                <a:spcPts val="0"/>
+              </a:spcBef>
+              <a:spcAft>
+                <a:spcPts val="0"/>
+              </a:spcAft>
+            </a:pPr>
+            <a:r>
+              <a:rPr sz="1600" b="1">
+                <a:solidFill>
+                  <a:srgbClr val="FF004E"/>
+                </a:solidFill>
+                <a:latin typeface="PingFang SC"/>
+                <a:ea typeface="PingFang SC"/>
+              </a:rPr>
+              <a:t>场景互动</a:t>
+            </a:r>
+          </a:p>
+        </p:txBody>
+      </p:sp>
+      <p:sp>
+        <p:nvSpPr>
+          <p:cNvPr id="14" name="TextBox 13"/>
+          <p:cNvSpPr txBox="1"/>
+          <p:nvPr/>
+        </p:nvSpPr>
+        <p:spPr>
+          <a:xfrm>
+            <a:off x="6345936" y="1664208"/>
+            <a:ext cx="2377440" cy="3383280"/>
+          </a:xfrm>
+          <a:prstGeom prst="rect">
+            <a:avLst/>
+          </a:prstGeom>
+          <a:noFill/>
+        </p:spPr>
+        <p:txBody>
+          <a:bodyPr wrap="square" anchor="t"/>
+          <a:lstStyle/>
+          <a:p>
+            <a:pPr algn="l">
+              <a:spcBef>
+                <a:spcPts val="0"/>
+              </a:spcBef>
+              <a:spcAft>
+                <a:spcPts val="0"/>
+              </a:spcAft>
+            </a:pPr>
+            <a:r>
+              <a:rPr sz="1300" b="0">
+                <a:solidFill>
+                  <a:srgbClr val="6B6B6B"/>
+                </a:solidFill>
+                <a:latin typeface="PingFang SC"/>
+                <a:ea typeface="PingFang SC"/>
+              </a:rPr>
+              <a:t>现场氛围感知：掌声分贝触发灯光秀。</a:t>
+            </a:r>
+          </a:p>
+          <a:p>
+            <a:pPr algn="l">
+              <a:spcBef>
+                <a:spcPts val="0"/>
+              </a:spcBef>
+              <a:spcAft>
+                <a:spcPts val="0"/>
+              </a:spcAft>
+            </a:pPr>
+            <a:r>
+              <a:rPr sz="1300" b="0">
+                <a:solidFill>
+                  <a:srgbClr val="6B6B6B"/>
+                </a:solidFill>
+                <a:latin typeface="PingFang SC"/>
+                <a:ea typeface="PingFang SC"/>
+              </a:rPr>
+              <a:t>参考互动应用，不做粉丝玩具。</a:t>
+            </a:r>
+          </a:p>
+          <a:p>
+            <a:pPr algn="l">
+              <a:spcBef>
+                <a:spcPts val="0"/>
+              </a:spcBef>
+              <a:spcAft>
+                <a:spcPts val="0"/>
+              </a:spcAft>
+            </a:pPr>
+            <a:r>
+              <a:rPr sz="1300" b="0">
+                <a:solidFill>
+                  <a:srgbClr val="6B6B6B"/>
+                </a:solidFill>
+                <a:latin typeface="PingFang SC"/>
+                <a:ea typeface="PingFang SC"/>
+              </a:rPr>
+              <a:t>给集成商看「整场系统会自己反应」。</a:t>
+            </a:r>
+          </a:p>
+        </p:txBody>
+      </p:sp>
+      <p:sp>
+        <p:nvSpPr>
+          <p:cNvPr id="15" name="Rectangle 14"/>
+          <p:cNvSpPr/>
+          <p:nvPr/>
+        </p:nvSpPr>
+        <p:spPr>
+          <a:xfrm>
+            <a:off x="9015984" y="1078992"/>
+            <a:ext cx="2670048" cy="4160520"/>
+          </a:xfrm>
+          <a:prstGeom prst="rect">
+            <a:avLst/>
+          </a:prstGeom>
+          <a:solidFill>
+            <a:srgbClr val="F6F6F5"/>
+          </a:solidFill>
+          <a:ln>
+            <a:noFill/>
+          </a:ln>
+          <a:effectLst/>
+        </p:spPr>
+        <p:style>
+          <a:lnRef idx="1">
+            <a:schemeClr val="accent1"/>
+          </a:lnRef>
+          <a:fillRef idx="3">
+            <a:schemeClr val="accent1"/>
+          </a:fillRef>
+          <a:effectRef idx="2">
+            <a:schemeClr val="accent1"/>
+          </a:effectRef>
+          <a:fontRef idx="minor">
+            <a:schemeClr val="lt1"/>
+          </a:fontRef>
+        </p:style>
+        <p:txBody>
+          <a:bodyPr rtlCol="0" anchor="ctr"/>
+          <a:lstStyle/>
+          <a:p>
+            <a:pPr algn="ctr"/>
+          </a:p>
+        </p:txBody>
+      </p:sp>
+      <p:sp>
+        <p:nvSpPr>
+          <p:cNvPr id="16" name="TextBox 15"/>
+          <p:cNvSpPr txBox="1"/>
+          <p:nvPr/>
+        </p:nvSpPr>
+        <p:spPr>
+          <a:xfrm>
+            <a:off x="9162288" y="1225296"/>
+            <a:ext cx="2377440" cy="365760"/>
+          </a:xfrm>
+          <a:prstGeom prst="rect">
+            <a:avLst/>
+          </a:prstGeom>
+          <a:noFill/>
+        </p:spPr>
+        <p:txBody>
+          <a:bodyPr wrap="square" anchor="t"/>
+          <a:lstStyle/>
+          <a:p>
+            <a:pPr algn="l">
+              <a:spcBef>
+                <a:spcPts val="0"/>
+              </a:spcBef>
+              <a:spcAft>
+                <a:spcPts val="0"/>
+              </a:spcAft>
+            </a:pPr>
+            <a:r>
+              <a:rPr sz="1600" b="1">
+                <a:solidFill>
+                  <a:srgbClr val="FF004E"/>
+                </a:solidFill>
+                <a:latin typeface="PingFang SC"/>
+                <a:ea typeface="PingFang SC"/>
+              </a:rPr>
+              <a:t>需求入口</a:t>
+            </a:r>
+          </a:p>
+        </p:txBody>
+      </p:sp>
+      <p:sp>
+        <p:nvSpPr>
+          <p:cNvPr id="17" name="TextBox 16"/>
+          <p:cNvSpPr txBox="1"/>
+          <p:nvPr/>
+        </p:nvSpPr>
+        <p:spPr>
+          <a:xfrm>
+            <a:off x="9162288" y="1664208"/>
+            <a:ext cx="2377440" cy="3383280"/>
+          </a:xfrm>
+          <a:prstGeom prst="rect">
+            <a:avLst/>
+          </a:prstGeom>
+          <a:noFill/>
+        </p:spPr>
+        <p:txBody>
+          <a:bodyPr wrap="square" anchor="t"/>
+          <a:lstStyle/>
+          <a:p>
+            <a:pPr algn="l">
+              <a:spcBef>
+                <a:spcPts val="0"/>
+              </a:spcBef>
+              <a:spcAft>
+                <a:spcPts val="0"/>
+              </a:spcAft>
+            </a:pPr>
+            <a:r>
+              <a:rPr sz="1300" b="0">
+                <a:solidFill>
+                  <a:srgbClr val="6B6B6B"/>
+                </a:solidFill>
+                <a:latin typeface="PingFang SC"/>
+                <a:ea typeface="PingFang SC"/>
+              </a:rPr>
+              <a:t>Solutions 页加 Custom AI Solution。</a:t>
+            </a:r>
+          </a:p>
+          <a:p>
+            <a:pPr algn="l">
+              <a:spcBef>
+                <a:spcPts val="0"/>
+              </a:spcBef>
+              <a:spcAft>
+                <a:spcPts val="0"/>
+              </a:spcAft>
+            </a:pPr>
+            <a:r>
+              <a:rPr sz="1300" b="0">
+                <a:solidFill>
+                  <a:srgbClr val="6B6B6B"/>
+                </a:solidFill>
+                <a:latin typeface="PingFang SC"/>
+                <a:ea typeface="PingFang SC"/>
+              </a:rPr>
+              <a:t>请客户写下：自动统计、售票、灯光编排。</a:t>
+            </a:r>
+          </a:p>
+          <a:p>
+            <a:pPr algn="l">
+              <a:spcBef>
+                <a:spcPts val="0"/>
+              </a:spcBef>
+              <a:spcAft>
+                <a:spcPts val="0"/>
+              </a:spcAft>
+            </a:pPr>
+            <a:r>
+              <a:rPr sz="1300" b="0">
+                <a:solidFill>
+                  <a:srgbClr val="6B6B6B"/>
+                </a:solidFill>
+                <a:latin typeface="PingFang SC"/>
+                <a:ea typeface="PingFang SC"/>
+              </a:rPr>
+              <a:t>用来收集需求，不假装功能已经交付。</a:t>
+            </a:r>
+          </a:p>
+        </p:txBody>
+      </p:sp>
+      <p:sp>
+        <p:nvSpPr>
+          <p:cNvPr id="18" name="Rectangle 17"/>
+          <p:cNvSpPr/>
+          <p:nvPr/>
+        </p:nvSpPr>
+        <p:spPr>
+          <a:xfrm>
+            <a:off x="566928" y="5413248"/>
+            <a:ext cx="11045952" cy="896112"/>
+          </a:xfrm>
+          <a:prstGeom prst="rect">
+            <a:avLst/>
+          </a:prstGeom>
+          <a:solidFill>
+            <a:srgbClr val="111111"/>
+          </a:solidFill>
+          <a:ln>
+            <a:noFill/>
+          </a:ln>
+          <a:effectLst/>
+        </p:spPr>
+        <p:style>
+          <a:lnRef idx="1">
+            <a:schemeClr val="accent1"/>
+          </a:lnRef>
+          <a:fillRef idx="3">
+            <a:schemeClr val="accent1"/>
+          </a:fillRef>
+          <a:effectRef idx="2">
+            <a:schemeClr val="accent1"/>
+          </a:effectRef>
+          <a:fontRef idx="minor">
+            <a:schemeClr val="lt1"/>
+          </a:fontRef>
+        </p:style>
+        <p:txBody>
+          <a:bodyPr rtlCol="0" anchor="ctr"/>
+          <a:lstStyle/>
+          <a:p>
+            <a:pPr algn="ctr"/>
+          </a:p>
+        </p:txBody>
+      </p:sp>
+      <p:sp>
+        <p:nvSpPr>
+          <p:cNvPr id="19" name="TextBox 18"/>
+          <p:cNvSpPr txBox="1"/>
+          <p:nvPr/>
+        </p:nvSpPr>
+        <p:spPr>
+          <a:xfrm>
+            <a:off x="749808" y="5541264"/>
+            <a:ext cx="10698480" cy="658368"/>
+          </a:xfrm>
+          <a:prstGeom prst="rect">
+            <a:avLst/>
+          </a:prstGeom>
+          <a:noFill/>
+        </p:spPr>
+        <p:txBody>
+          <a:bodyPr wrap="square" anchor="ctr"/>
+          <a:lstStyle/>
+          <a:p>
+            <a:pPr algn="l">
+              <a:spcBef>
+                <a:spcPts val="0"/>
+              </a:spcBef>
+              <a:spcAft>
+                <a:spcPts val="0"/>
+              </a:spcAft>
+            </a:pPr>
+            <a:r>
+              <a:rPr sz="1400" b="0">
+                <a:solidFill>
+                  <a:srgbClr val="FFFFFF"/>
+                </a:solidFill>
+                <a:latin typeface="PingFang SC"/>
+                <a:ea typeface="PingFang SC"/>
+              </a:rPr>
+              <a:t>纪律：德文主站今秋主诉仍是一人操作系统 + SCORE / LED。Agent 只出现在简报、LinkedIn 和封闭活动，不替代现有产品名。</a:t>
+            </a:r>
+          </a:p>
+        </p:txBody>
+      </p:sp>
+      <p:sp>
+        <p:nvSpPr>
+          <p:cNvPr id="20" name="TextBox 19"/>
+          <p:cNvSpPr txBox="1"/>
+          <p:nvPr/>
+        </p:nvSpPr>
+        <p:spPr>
+          <a:xfrm>
+            <a:off x="566928" y="6565392"/>
+            <a:ext cx="7315200" cy="219456"/>
+          </a:xfrm>
+          <a:prstGeom prst="rect">
+            <a:avLst/>
+          </a:prstGeom>
+          <a:noFill/>
+        </p:spPr>
+        <p:txBody>
+          <a:bodyPr wrap="square" anchor="t"/>
+          <a:lstStyle/>
+          <a:p>
+            <a:pPr algn="l">
+              <a:spcBef>
+                <a:spcPts val="0"/>
+              </a:spcBef>
+              <a:spcAft>
+                <a:spcPts val="0"/>
+              </a:spcAft>
+            </a:pPr>
+            <a:r>
+              <a:rPr sz="1000" b="0">
+                <a:solidFill>
+                  <a:srgbClr val="6B6B6B"/>
+                </a:solidFill>
+                <a:latin typeface="PingFang SC"/>
+                <a:ea typeface="PingFang SC"/>
+              </a:rPr>
+              <a:t>SLAM.SYSTEMS  ·  GTM 2026 Q4 – 2027 Q1</a:t>
+            </a:r>
+          </a:p>
+        </p:txBody>
+      </p:sp>
+      <p:sp>
+        <p:nvSpPr>
+          <p:cNvPr id="21" name="TextBox 20"/>
+          <p:cNvSpPr txBox="1"/>
+          <p:nvPr/>
+        </p:nvSpPr>
+        <p:spPr>
+          <a:xfrm>
+            <a:off x="10241280" y="6565392"/>
+            <a:ext cx="1371600" cy="219456"/>
+          </a:xfrm>
+          <a:prstGeom prst="rect">
+            <a:avLst/>
+          </a:prstGeom>
+          <a:noFill/>
+        </p:spPr>
+        <p:txBody>
+          <a:bodyPr wrap="square" anchor="t"/>
+          <a:lstStyle/>
+          <a:p>
+            <a:pPr algn="r">
+              <a:spcBef>
+                <a:spcPts val="0"/>
+              </a:spcBef>
+              <a:spcAft>
+                <a:spcPts val="0"/>
+              </a:spcAft>
+            </a:pPr>
+            <a:r>
+              <a:rPr sz="1000" b="0">
+                <a:solidFill>
+                  <a:srgbClr val="6B6B6B"/>
+                </a:solidFill>
+                <a:latin typeface="PingFang SC"/>
+                <a:ea typeface="PingFang SC"/>
+              </a:rPr>
+              <a:t>11 / 12</a:t>
+            </a:r>
+          </a:p>
+        </p:txBody>
+      </p:sp>
+      <p:sp>
+        <p:nvSpPr>
+          <p:cNvPr id="22" name="Rectangle 21"/>
+          <p:cNvSpPr/>
+          <p:nvPr/>
+        </p:nvSpPr>
+        <p:spPr>
+          <a:xfrm>
+            <a:off x="566928" y="6510528"/>
+            <a:ext cx="11045952" cy="9525"/>
+          </a:xfrm>
+          <a:prstGeom prst="rect">
+            <a:avLst/>
+          </a:prstGeom>
+          <a:solidFill>
+            <a:srgbClr val="E6E6E6"/>
+          </a:solidFill>
+          <a:ln>
+            <a:noFill/>
+          </a:ln>
+          <a:effectLst/>
+        </p:spPr>
+        <p:style>
+          <a:lnRef idx="1">
+            <a:schemeClr val="accent1"/>
+          </a:lnRef>
+          <a:fillRef idx="3">
+            <a:schemeClr val="accent1"/>
+          </a:fillRef>
+          <a:effectRef idx="2">
+            <a:schemeClr val="accent1"/>
+          </a:effectRef>
+          <a:fontRef idx="minor">
+            <a:schemeClr val="lt1"/>
+          </a:fontRef>
+        </p:style>
+        <p:txBody>
+          <a:bodyPr rtlCol="0" anchor="ctr"/>
+          <a:lstStyle/>
+          <a:p>
+            <a:pPr algn="ctr"/>
+          </a:p>
+        </p:txBody>
+      </p:sp>
+    </p:spTree>
+  </p:cSld>
+  <p:clrMapOvr>
+    <a:masterClrMapping/>
+  </p:clrMapOvr>
+</p:sld>
+</file>
+
+<file path=ppt/slides/slide12.xml><?xml version="1.0" encoding="utf-8"?>
+<p:sld xmlns:a="http://schemas.openxmlformats.org/drawingml/2006/main" xmlns:p="http://schemas.openxmlformats.org/presentationml/2006/main" xmlns:r="http://schemas.openxmlformats.org/officeDocument/2006/relationships">
+  <p:cSld>
+    <p:spTree>
+      <p:nvGrpSpPr>
+        <p:cNvPr id="1" name=""/>
+        <p:cNvGrpSpPr/>
+        <p:nvPr/>
+      </p:nvGrpSpPr>
+      <p:grpSpPr/>
+      <p:sp>
+        <p:nvSpPr>
+          <p:cNvPr id="2" name="Rectangle 1"/>
+          <p:cNvSpPr/>
+          <p:nvPr/>
+        </p:nvSpPr>
+        <p:spPr>
+          <a:xfrm>
+            <a:off x="0" y="0"/>
+            <a:ext cx="12191695" cy="6858000"/>
+          </a:xfrm>
+          <a:prstGeom prst="rect">
+            <a:avLst/>
+          </a:prstGeom>
+          <a:solidFill>
+            <a:srgbClr val="FFFFFF"/>
+          </a:solidFill>
+          <a:ln>
+            <a:noFill/>
+          </a:ln>
+          <a:effectLst/>
+        </p:spPr>
+        <p:style>
+          <a:lnRef idx="1">
+            <a:schemeClr val="accent1"/>
+          </a:lnRef>
+          <a:fillRef idx="3">
+            <a:schemeClr val="accent1"/>
+          </a:fillRef>
+          <a:effectRef idx="2">
+            <a:schemeClr val="accent1"/>
+          </a:effectRef>
+          <a:fontRef idx="minor">
+            <a:schemeClr val="lt1"/>
+          </a:fontRef>
+        </p:style>
+        <p:txBody>
+          <a:bodyPr rtlCol="0" anchor="ctr"/>
+          <a:lstStyle/>
+          <a:p>
+            <a:pPr algn="ctr"/>
+          </a:p>
+        </p:txBody>
+      </p:sp>
+      <p:sp>
+        <p:nvSpPr>
+          <p:cNvPr id="3" name="TextBox 2"/>
+          <p:cNvSpPr txBox="1"/>
+          <p:nvPr/>
+        </p:nvSpPr>
+        <p:spPr>
+          <a:xfrm>
+            <a:off x="566928" y="219456"/>
+            <a:ext cx="10972800" cy="201168"/>
+          </a:xfrm>
+          <a:prstGeom prst="rect">
+            <a:avLst/>
+          </a:prstGeom>
+          <a:noFill/>
+        </p:spPr>
+        <p:txBody>
+          <a:bodyPr wrap="square" anchor="t"/>
+          <a:lstStyle/>
+          <a:p>
+            <a:pPr algn="l">
+              <a:spcBef>
+                <a:spcPts val="0"/>
+              </a:spcBef>
+              <a:spcAft>
+                <a:spcPts val="0"/>
+              </a:spcAft>
+            </a:pPr>
+            <a:r>
+              <a:rPr sz="1100" b="1">
+                <a:solidFill>
+                  <a:srgbClr val="FF004E"/>
+                </a:solidFill>
+                <a:latin typeface="PingFang SC"/>
+                <a:ea typeface="PingFang SC"/>
+              </a:rPr>
+              <a:t>11  /  九十天必须交出来的东西</a:t>
             </a:r>
           </a:p>
         </p:txBody>
@@ -5772,7 +6856,7 @@
                 <a:latin typeface="PingFang SC"/>
                 <a:ea typeface="PingFang SC"/>
               </a:rPr>
-              <a:t>EN+ZH 首页 / 三社媒首发</a:t>
+              <a:t>EN+ZH 首页 / LI+IG 首发</a:t>
             </a:r>
           </a:p>
         </p:txBody>
@@ -6033,7 +7117,7 @@
                 <a:latin typeface="PingFang SC"/>
                 <a:ea typeface="PingFang SC"/>
               </a:rPr>
-              <a:t>3 语 + 3 账号</a:t>
+              <a:t>2 个账号先活</a:t>
             </a:r>
           </a:p>
         </p:txBody>
@@ -6207,7 +7291,7 @@
                 <a:latin typeface="PingFang SC"/>
                 <a:ea typeface="PingFang SC"/>
               </a:rPr>
-              <a:t>三支视频可嵌官网</a:t>
+              <a:t>7 秒 SCORE 片 + 表单跳转</a:t>
             </a:r>
           </a:p>
         </p:txBody>
@@ -6294,7 +7378,7 @@
                 <a:latin typeface="PingFang SC"/>
                 <a:ea typeface="PingFang SC"/>
               </a:rPr>
-              <a:t>社媒 · 邮件</a:t>
+              <a:t>独立站 · 视频</a:t>
             </a:r>
           </a:p>
         </p:txBody>
@@ -6468,7 +7552,7 @@
                 <a:latin typeface="PingFang SC"/>
                 <a:ea typeface="PingFang SC"/>
               </a:rPr>
-              <a:t>60s+30s+30s</a:t>
+              <a:t>7s → 表单</a:t>
             </a:r>
           </a:p>
         </p:txBody>
@@ -9680,7 +10764,7 @@
                 <a:latin typeface="PingFang SC"/>
                 <a:ea typeface="PingFang SC"/>
               </a:rPr>
-              <a:t>11 / 11</a:t>
+              <a:t>12 / 12</a:t>
             </a:r>
           </a:p>
         </p:txBody>
@@ -10827,7 +11911,7 @@
                 <a:latin typeface="PingFang SC"/>
                 <a:ea typeface="PingFang SC"/>
               </a:rPr>
-              <a:t>2 / 11</a:t>
+              <a:t>2 / 12</a:t>
             </a:r>
           </a:p>
         </p:txBody>
@@ -13420,7 +14504,7 @@
                 <a:latin typeface="PingFang SC"/>
                 <a:ea typeface="PingFang SC"/>
               </a:rPr>
-              <a:t>3 / 11</a:t>
+              <a:t>3 / 12</a:t>
             </a:r>
           </a:p>
         </p:txBody>
@@ -14519,7 +15603,7 @@
                 <a:latin typeface="PingFang SC"/>
                 <a:ea typeface="PingFang SC"/>
               </a:rPr>
-              <a:t>4 / 11</a:t>
+              <a:t>4 / 12</a:t>
             </a:r>
           </a:p>
         </p:txBody>
@@ -15419,7 +16503,7 @@
                 <a:latin typeface="PingFang SC"/>
                 <a:ea typeface="PingFang SC"/>
               </a:rPr>
-              <a:t>三支片子、一份项目 PDF。所有邮件、社媒、展会二维码指回这里。</a:t>
+              <a:t>7 秒 SCORE 片播完跳转表单（主题 Scoreboard Handball）。再加系统片 / LED 片和项目 PDF。</a:t>
             </a:r>
           </a:p>
         </p:txBody>
@@ -15873,7 +16957,7 @@
                 <a:latin typeface="PingFang SC"/>
                 <a:ea typeface="PingFang SC"/>
               </a:rPr>
-              <a:t>5 / 11</a:t>
+              <a:t>5 / 12</a:t>
             </a:r>
           </a:p>
         </p:txBody>
@@ -16061,7 +17145,7 @@
                 <a:latin typeface="PingFang SC"/>
                 <a:ea typeface="PingFang SC"/>
               </a:rPr>
-              <a:t>只做三家。发现场，不发参数。展会周加码。</a:t>
+              <a:t>先开两家验证。瑞士独立号注册。发现场，不发参数。</a:t>
             </a:r>
           </a:p>
         </p:txBody>
@@ -16119,7 +17203,7 @@
         <p:spPr>
           <a:xfrm>
             <a:off x="566928" y="1024128"/>
-            <a:ext cx="1554480" cy="960120"/>
+            <a:ext cx="1691640" cy="749808"/>
           </a:xfrm>
           <a:prstGeom prst="rect">
             <a:avLst/>
@@ -16165,7 +17249,7 @@
         <p:spPr>
           <a:xfrm>
             <a:off x="640080" y="1060704"/>
-            <a:ext cx="1408176" cy="905256"/>
+            <a:ext cx="1545336" cy="694944"/>
           </a:xfrm>
           <a:prstGeom prst="rect">
             <a:avLst/>
@@ -16205,8 +17289,8 @@
         </p:nvSpPr>
         <p:spPr>
           <a:xfrm>
-            <a:off x="2121408" y="1024128"/>
-            <a:ext cx="2240280" cy="960120"/>
+            <a:off x="2258568" y="1024128"/>
+            <a:ext cx="2148840" cy="749808"/>
           </a:xfrm>
           <a:prstGeom prst="rect">
             <a:avLst/>
@@ -16251,8 +17335,8 @@
         </p:nvSpPr>
         <p:spPr>
           <a:xfrm>
-            <a:off x="2194560" y="1060704"/>
-            <a:ext cx="2093976" cy="905256"/>
+            <a:off x="2331720" y="1060704"/>
+            <a:ext cx="2002536" cy="694944"/>
           </a:xfrm>
           <a:prstGeom prst="rect">
             <a:avLst/>
@@ -16279,7 +17363,7 @@
                 <a:latin typeface="PingFang SC"/>
                 <a:ea typeface="PingFang SC"/>
               </a:rPr>
-              <a:t>为什么</a:t>
+              <a:t>阶段</a:t>
             </a:r>
           </a:p>
         </p:txBody>
@@ -16292,8 +17376,8 @@
         </p:nvSpPr>
         <p:spPr>
           <a:xfrm>
-            <a:off x="4361688" y="1024128"/>
-            <a:ext cx="3154680" cy="960120"/>
+            <a:off x="4407408" y="1024128"/>
+            <a:ext cx="3063240" cy="749808"/>
           </a:xfrm>
           <a:prstGeom prst="rect">
             <a:avLst/>
@@ -16338,8 +17422,8 @@
         </p:nvSpPr>
         <p:spPr>
           <a:xfrm>
-            <a:off x="4434840" y="1060704"/>
-            <a:ext cx="3008376" cy="905256"/>
+            <a:off x="4480560" y="1060704"/>
+            <a:ext cx="2916936" cy="694944"/>
           </a:xfrm>
           <a:prstGeom prst="rect">
             <a:avLst/>
@@ -16379,8 +17463,8 @@
         </p:nvSpPr>
         <p:spPr>
           <a:xfrm>
-            <a:off x="7516368" y="1024128"/>
-            <a:ext cx="1828800" cy="960120"/>
+            <a:off x="7470648" y="1024128"/>
+            <a:ext cx="1965960" cy="749808"/>
           </a:xfrm>
           <a:prstGeom prst="rect">
             <a:avLst/>
@@ -16425,8 +17509,8 @@
         </p:nvSpPr>
         <p:spPr>
           <a:xfrm>
-            <a:off x="7589520" y="1060704"/>
-            <a:ext cx="1682496" cy="905256"/>
+            <a:off x="7543800" y="1060704"/>
+            <a:ext cx="1819656" cy="694944"/>
           </a:xfrm>
           <a:prstGeom prst="rect">
             <a:avLst/>
@@ -16466,8 +17550,8 @@
         </p:nvSpPr>
         <p:spPr>
           <a:xfrm>
-            <a:off x="9345168" y="1024128"/>
-            <a:ext cx="2240280" cy="960120"/>
+            <a:off x="9436608" y="1024128"/>
+            <a:ext cx="2148840" cy="749808"/>
           </a:xfrm>
           <a:prstGeom prst="rect">
             <a:avLst/>
@@ -16512,8 +17596,8 @@
         </p:nvSpPr>
         <p:spPr>
           <a:xfrm>
-            <a:off x="9418320" y="1060704"/>
-            <a:ext cx="2093976" cy="905256"/>
+            <a:off x="9509760" y="1060704"/>
+            <a:ext cx="2002536" cy="694944"/>
           </a:xfrm>
           <a:prstGeom prst="rect">
             <a:avLst/>
@@ -16540,7 +17624,7 @@
                 <a:latin typeface="PingFang SC"/>
                 <a:ea typeface="PingFang SC"/>
               </a:rPr>
-              <a:t>谁来发</a:t>
+              <a:t>谁</a:t>
             </a:r>
           </a:p>
         </p:txBody>
@@ -16553,8 +17637,8 @@
         </p:nvSpPr>
         <p:spPr>
           <a:xfrm>
-            <a:off x="566928" y="1984248"/>
-            <a:ext cx="1554480" cy="960120"/>
+            <a:off x="566928" y="1773936"/>
+            <a:ext cx="1691640" cy="749808"/>
           </a:xfrm>
           <a:prstGeom prst="rect">
             <a:avLst/>
@@ -16599,8 +17683,8 @@
         </p:nvSpPr>
         <p:spPr>
           <a:xfrm>
-            <a:off x="640080" y="2020824"/>
-            <a:ext cx="1408176" cy="905256"/>
+            <a:off x="640080" y="1810512"/>
+            <a:ext cx="1545336" cy="694944"/>
           </a:xfrm>
           <a:prstGeom prst="rect">
             <a:avLst/>
@@ -16620,7 +17704,7 @@
               </a:spcAft>
             </a:pPr>
             <a:r>
-              <a:rPr sz="1200" b="1">
+              <a:rPr sz="1100" b="1">
                 <a:solidFill>
                   <a:srgbClr val="111111"/>
                 </a:solidFill>
@@ -16640,8 +17724,8 @@
         </p:nvSpPr>
         <p:spPr>
           <a:xfrm>
-            <a:off x="2121408" y="1984248"/>
-            <a:ext cx="2240280" cy="960120"/>
+            <a:off x="2258568" y="1773936"/>
+            <a:ext cx="2148840" cy="749808"/>
           </a:xfrm>
           <a:prstGeom prst="rect">
             <a:avLst/>
@@ -16686,8 +17770,8 @@
         </p:nvSpPr>
         <p:spPr>
           <a:xfrm>
-            <a:off x="2194560" y="2020824"/>
-            <a:ext cx="2093976" cy="905256"/>
+            <a:off x="2331720" y="1810512"/>
+            <a:ext cx="2002536" cy="694944"/>
           </a:xfrm>
           <a:prstGeom prst="rect">
             <a:avLst/>
@@ -16707,34 +17791,34 @@
               </a:spcAft>
             </a:pPr>
             <a:r>
-              <a:rPr sz="1200" b="0">
+              <a:rPr sz="1100" b="0">
                 <a:solidFill>
                   <a:srgbClr val="111111"/>
                 </a:solidFill>
                 <a:latin typeface="PingFang SC"/>
                 <a:ea typeface="PingFang SC"/>
               </a:rPr>
-              <a:t>买家在这里。</a:t>
-            </a:r>
-          </a:p>
-          <a:p>
-            <a:pPr algn="l">
-              <a:spcBef>
-                <a:spcPts val="0"/>
-              </a:spcBef>
-              <a:spcAft>
-                <a:spcPts val="0"/>
-              </a:spcAft>
-            </a:pPr>
-            <a:r>
-              <a:rPr sz="1200" b="0">
+              <a:t>现在开</a:t>
+            </a:r>
+          </a:p>
+          <a:p>
+            <a:pPr algn="l">
+              <a:spcBef>
+                <a:spcPts val="0"/>
+              </a:spcBef>
+              <a:spcAft>
+                <a:spcPts val="0"/>
+              </a:spcAft>
+            </a:pPr>
+            <a:r>
+              <a:rPr sz="1100" b="0">
                 <a:solidFill>
                   <a:srgbClr val="111111"/>
                 </a:solidFill>
                 <a:latin typeface="PingFang SC"/>
                 <a:ea typeface="PingFang SC"/>
               </a:rPr>
-              <a:t>获客主场。</a:t>
+              <a:t>商务获客主场</a:t>
             </a:r>
           </a:p>
         </p:txBody>
@@ -16747,8 +17831,8 @@
         </p:nvSpPr>
         <p:spPr>
           <a:xfrm>
-            <a:off x="4361688" y="1984248"/>
-            <a:ext cx="3154680" cy="960120"/>
+            <a:off x="4407408" y="1773936"/>
+            <a:ext cx="3063240" cy="749808"/>
           </a:xfrm>
           <a:prstGeom prst="rect">
             <a:avLst/>
@@ -16793,8 +17877,8 @@
         </p:nvSpPr>
         <p:spPr>
           <a:xfrm>
-            <a:off x="4434840" y="2020824"/>
-            <a:ext cx="3008376" cy="905256"/>
+            <a:off x="4480560" y="1810512"/>
+            <a:ext cx="2916936" cy="694944"/>
           </a:xfrm>
           <a:prstGeom prst="rect">
             <a:avLst/>
@@ -16814,7 +17898,7 @@
               </a:spcAft>
             </a:pPr>
             <a:r>
-              <a:rPr sz="1200" b="0">
+              <a:rPr sz="1100" b="0">
                 <a:solidFill>
                   <a:srgbClr val="111111"/>
                 </a:solidFill>
@@ -16834,14 +17918,14 @@
               </a:spcAft>
             </a:pPr>
             <a:r>
-              <a:rPr sz="1200" b="0">
+              <a:rPr sz="1100" b="0">
                 <a:solidFill>
                   <a:srgbClr val="111111"/>
                 </a:solidFill>
                 <a:latin typeface="PingFang SC"/>
                 <a:ea typeface="PingFang SC"/>
               </a:rPr>
-              <a:t>展会约见入口。</a:t>
+              <a:t>展会约见。德语母版。</a:t>
             </a:r>
           </a:p>
         </p:txBody>
@@ -16854,8 +17938,8 @@
         </p:nvSpPr>
         <p:spPr>
           <a:xfrm>
-            <a:off x="7516368" y="1984248"/>
-            <a:ext cx="1828800" cy="960120"/>
+            <a:off x="7470648" y="1773936"/>
+            <a:ext cx="1965960" cy="749808"/>
           </a:xfrm>
           <a:prstGeom prst="rect">
             <a:avLst/>
@@ -16900,8 +17984,8 @@
         </p:nvSpPr>
         <p:spPr>
           <a:xfrm>
-            <a:off x="7589520" y="2020824"/>
-            <a:ext cx="1682496" cy="905256"/>
+            <a:off x="7543800" y="1810512"/>
+            <a:ext cx="1819656" cy="694944"/>
           </a:xfrm>
           <a:prstGeom prst="rect">
             <a:avLst/>
@@ -16921,34 +18005,34 @@
               </a:spcAft>
             </a:pPr>
             <a:r>
-              <a:rPr sz="1200" b="0">
+              <a:rPr sz="1100" b="0">
                 <a:solidFill>
                   <a:srgbClr val="111111"/>
                 </a:solidFill>
                 <a:latin typeface="PingFang SC"/>
                 <a:ea typeface="PingFang SC"/>
               </a:rPr>
-              <a:t>2 条/周</a:t>
-            </a:r>
-          </a:p>
-          <a:p>
-            <a:pPr algn="l">
-              <a:spcBef>
-                <a:spcPts val="0"/>
-              </a:spcBef>
-              <a:spcAft>
-                <a:spcPts val="0"/>
-              </a:spcAft>
-            </a:pPr>
-            <a:r>
-              <a:rPr sz="1200" b="0">
+              <a:t>2–3 天一条</a:t>
+            </a:r>
+          </a:p>
+          <a:p>
+            <a:pPr algn="l">
+              <a:spcBef>
+                <a:spcPts val="0"/>
+              </a:spcBef>
+              <a:spcAft>
+                <a:spcPts val="0"/>
+              </a:spcAft>
+            </a:pPr>
+            <a:r>
+              <a:rPr sz="1100" b="0">
                 <a:solidFill>
                   <a:srgbClr val="111111"/>
                 </a:solidFill>
                 <a:latin typeface="PingFang SC"/>
                 <a:ea typeface="PingFang SC"/>
               </a:rPr>
-              <a:t>展会周 4 条</a:t>
+              <a:t>展会周加倍</a:t>
             </a:r>
           </a:p>
         </p:txBody>
@@ -16961,8 +18045,8 @@
         </p:nvSpPr>
         <p:spPr>
           <a:xfrm>
-            <a:off x="9345168" y="1984248"/>
-            <a:ext cx="2240280" cy="960120"/>
+            <a:off x="9436608" y="1773936"/>
+            <a:ext cx="2148840" cy="749808"/>
           </a:xfrm>
           <a:prstGeom prst="rect">
             <a:avLst/>
@@ -17007,8 +18091,8 @@
         </p:nvSpPr>
         <p:spPr>
           <a:xfrm>
-            <a:off x="9418320" y="2020824"/>
-            <a:ext cx="2093976" cy="905256"/>
+            <a:off x="9509760" y="1810512"/>
+            <a:ext cx="2002536" cy="694944"/>
           </a:xfrm>
           <a:prstGeom prst="rect">
             <a:avLst/>
@@ -17028,7 +18112,7 @@
               </a:spcAft>
             </a:pPr>
             <a:r>
-              <a:rPr sz="1200" b="0">
+              <a:rPr sz="1100" b="0">
                 <a:solidFill>
                   <a:srgbClr val="111111"/>
                 </a:solidFill>
@@ -17048,7 +18132,7 @@
               </a:spcAft>
             </a:pPr>
             <a:r>
-              <a:rPr sz="1200" b="0">
+              <a:rPr sz="1100" b="0">
                 <a:solidFill>
                   <a:srgbClr val="111111"/>
                 </a:solidFill>
@@ -17068,8 +18152,8 @@
         </p:nvSpPr>
         <p:spPr>
           <a:xfrm>
-            <a:off x="566928" y="2944368"/>
-            <a:ext cx="1554480" cy="960120"/>
+            <a:off x="566928" y="2523744"/>
+            <a:ext cx="1691640" cy="749808"/>
           </a:xfrm>
           <a:prstGeom prst="rect">
             <a:avLst/>
@@ -17114,8 +18198,8 @@
         </p:nvSpPr>
         <p:spPr>
           <a:xfrm>
-            <a:off x="640080" y="2980944"/>
-            <a:ext cx="1408176" cy="905256"/>
+            <a:off x="640080" y="2560320"/>
+            <a:ext cx="1545336" cy="694944"/>
           </a:xfrm>
           <a:prstGeom prst="rect">
             <a:avLst/>
@@ -17135,7 +18219,7 @@
               </a:spcAft>
             </a:pPr>
             <a:r>
-              <a:rPr sz="1200" b="1">
+              <a:rPr sz="1100" b="1">
                 <a:solidFill>
                   <a:srgbClr val="111111"/>
                 </a:solidFill>
@@ -17155,8 +18239,8 @@
         </p:nvSpPr>
         <p:spPr>
           <a:xfrm>
-            <a:off x="2121408" y="2944368"/>
-            <a:ext cx="2240280" cy="960120"/>
+            <a:off x="2258568" y="2523744"/>
+            <a:ext cx="2148840" cy="749808"/>
           </a:xfrm>
           <a:prstGeom prst="rect">
             <a:avLst/>
@@ -17201,8 +18285,8 @@
         </p:nvSpPr>
         <p:spPr>
           <a:xfrm>
-            <a:off x="2194560" y="2980944"/>
-            <a:ext cx="2093976" cy="905256"/>
+            <a:off x="2331720" y="2560320"/>
+            <a:ext cx="2002536" cy="694944"/>
           </a:xfrm>
           <a:prstGeom prst="rect">
             <a:avLst/>
@@ -17222,34 +18306,34 @@
               </a:spcAft>
             </a:pPr>
             <a:r>
-              <a:rPr sz="1200" b="0">
+              <a:rPr sz="1100" b="0">
                 <a:solidFill>
                   <a:srgbClr val="111111"/>
                 </a:solidFill>
                 <a:latin typeface="PingFang SC"/>
                 <a:ea typeface="PingFang SC"/>
               </a:rPr>
-              <a:t>画面即证据。</a:t>
-            </a:r>
-          </a:p>
-          <a:p>
-            <a:pPr algn="l">
-              <a:spcBef>
-                <a:spcPts val="0"/>
-              </a:spcBef>
-              <a:spcAft>
-                <a:spcPts val="0"/>
-              </a:spcAft>
-            </a:pPr>
-            <a:r>
-              <a:rPr sz="1200" b="0">
+              <a:t>现在开</a:t>
+            </a:r>
+          </a:p>
+          <a:p>
+            <a:pPr algn="l">
+              <a:spcBef>
+                <a:spcPts val="0"/>
+              </a:spcBef>
+              <a:spcAft>
+                <a:spcPts val="0"/>
+              </a:spcAft>
+            </a:pPr>
+            <a:r>
+              <a:rPr sz="1100" b="0">
                 <a:solidFill>
                   <a:srgbClr val="111111"/>
                 </a:solidFill>
                 <a:latin typeface="PingFang SC"/>
                 <a:ea typeface="PingFang SC"/>
               </a:rPr>
-              <a:t>给集成商转发。</a:t>
+              <a:t>画面即证据</a:t>
             </a:r>
           </a:p>
         </p:txBody>
@@ -17262,8 +18346,8 @@
         </p:nvSpPr>
         <p:spPr>
           <a:xfrm>
-            <a:off x="4361688" y="2944368"/>
-            <a:ext cx="3154680" cy="960120"/>
+            <a:off x="4407408" y="2523744"/>
+            <a:ext cx="3063240" cy="749808"/>
           </a:xfrm>
           <a:prstGeom prst="rect">
             <a:avLst/>
@@ -17308,8 +18392,8 @@
         </p:nvSpPr>
         <p:spPr>
           <a:xfrm>
-            <a:off x="4434840" y="2980944"/>
-            <a:ext cx="3008376" cy="905256"/>
+            <a:off x="4480560" y="2560320"/>
+            <a:ext cx="2916936" cy="694944"/>
           </a:xfrm>
           <a:prstGeom prst="rect">
             <a:avLst/>
@@ -17329,27 +18413,27 @@
               </a:spcAft>
             </a:pPr>
             <a:r>
-              <a:rPr sz="1200" b="0">
+              <a:rPr sz="1100" b="0">
                 <a:solidFill>
                   <a:srgbClr val="111111"/>
                 </a:solidFill>
                 <a:latin typeface="PingFang SC"/>
                 <a:ea typeface="PingFang SC"/>
               </a:rPr>
-              <a:t>控制室 15 秒、LED 近景、</a:t>
-            </a:r>
-          </a:p>
-          <a:p>
-            <a:pPr algn="l">
-              <a:spcBef>
-                <a:spcPts val="0"/>
-              </a:spcBef>
-              <a:spcAft>
-                <a:spcPts val="0"/>
-              </a:spcAft>
-            </a:pPr>
-            <a:r>
-              <a:rPr sz="1200" b="0">
+              <a:t>Reels：控制室、LED 近景、</a:t>
+            </a:r>
+          </a:p>
+          <a:p>
+            <a:pPr algn="l">
+              <a:spcBef>
+                <a:spcPts val="0"/>
+              </a:spcBef>
+              <a:spcAft>
+                <a:spcPts val="0"/>
+              </a:spcAft>
+            </a:pPr>
+            <a:r>
+              <a:rPr sz="1100" b="0">
                 <a:solidFill>
                   <a:srgbClr val="111111"/>
                 </a:solidFill>
@@ -17369,8 +18453,8 @@
         </p:nvSpPr>
         <p:spPr>
           <a:xfrm>
-            <a:off x="7516368" y="2944368"/>
-            <a:ext cx="1828800" cy="960120"/>
+            <a:off x="7470648" y="2523744"/>
+            <a:ext cx="1965960" cy="749808"/>
           </a:xfrm>
           <a:prstGeom prst="rect">
             <a:avLst/>
@@ -17415,8 +18499,8 @@
         </p:nvSpPr>
         <p:spPr>
           <a:xfrm>
-            <a:off x="7589520" y="2980944"/>
-            <a:ext cx="1682496" cy="905256"/>
+            <a:off x="7543800" y="2560320"/>
+            <a:ext cx="1819656" cy="694944"/>
           </a:xfrm>
           <a:prstGeom prst="rect">
             <a:avLst/>
@@ -17436,14 +18520,14 @@
               </a:spcAft>
             </a:pPr>
             <a:r>
-              <a:rPr sz="1200" b="0">
+              <a:rPr sz="1100" b="0">
                 <a:solidFill>
                   <a:srgbClr val="111111"/>
                 </a:solidFill>
                 <a:latin typeface="PingFang SC"/>
                 <a:ea typeface="PingFang SC"/>
               </a:rPr>
-              <a:t>3 条/周</a:t>
+              <a:t>2–3 天一条</a:t>
             </a:r>
           </a:p>
         </p:txBody>
@@ -17456,8 +18540,8 @@
         </p:nvSpPr>
         <p:spPr>
           <a:xfrm>
-            <a:off x="9345168" y="2944368"/>
-            <a:ext cx="2240280" cy="960120"/>
+            <a:off x="9436608" y="2523744"/>
+            <a:ext cx="2148840" cy="749808"/>
           </a:xfrm>
           <a:prstGeom prst="rect">
             <a:avLst/>
@@ -17502,8 +18586,8 @@
         </p:nvSpPr>
         <p:spPr>
           <a:xfrm>
-            <a:off x="9418320" y="2980944"/>
-            <a:ext cx="2093976" cy="905256"/>
+            <a:off x="9509760" y="2560320"/>
+            <a:ext cx="2002536" cy="694944"/>
           </a:xfrm>
           <a:prstGeom prst="rect">
             <a:avLst/>
@@ -17523,7 +18607,7 @@
               </a:spcAft>
             </a:pPr>
             <a:r>
-              <a:rPr sz="1200" b="0">
+              <a:rPr sz="1100" b="0">
                 <a:solidFill>
                   <a:srgbClr val="111111"/>
                 </a:solidFill>
@@ -17543,14 +18627,14 @@
               </a:spcAft>
             </a:pPr>
             <a:r>
-              <a:rPr sz="1200" b="0">
+              <a:rPr sz="1100" b="0">
                 <a:solidFill>
                   <a:srgbClr val="111111"/>
                 </a:solidFill>
                 <a:latin typeface="PingFang SC"/>
                 <a:ea typeface="PingFang SC"/>
               </a:rPr>
-              <a:t>素材来自现场</a:t>
+              <a:t>现场素材</a:t>
             </a:r>
           </a:p>
         </p:txBody>
@@ -17563,8 +18647,8 @@
         </p:nvSpPr>
         <p:spPr>
           <a:xfrm>
-            <a:off x="566928" y="3904488"/>
-            <a:ext cx="1554480" cy="960120"/>
+            <a:off x="566928" y="3273552"/>
+            <a:ext cx="1691640" cy="749808"/>
           </a:xfrm>
           <a:prstGeom prst="rect">
             <a:avLst/>
@@ -17609,8 +18693,8 @@
         </p:nvSpPr>
         <p:spPr>
           <a:xfrm>
-            <a:off x="640080" y="3941064"/>
-            <a:ext cx="1408176" cy="905256"/>
+            <a:off x="640080" y="3310128"/>
+            <a:ext cx="1545336" cy="694944"/>
           </a:xfrm>
           <a:prstGeom prst="rect">
             <a:avLst/>
@@ -17630,14 +18714,14 @@
               </a:spcAft>
             </a:pPr>
             <a:r>
-              <a:rPr sz="1200" b="1">
+              <a:rPr sz="1100" b="1">
                 <a:solidFill>
                   <a:srgbClr val="111111"/>
                 </a:solidFill>
                 <a:latin typeface="PingFang SC"/>
                 <a:ea typeface="PingFang SC"/>
               </a:rPr>
-              <a:t>YouTube</a:t>
+              <a:t>X / Twitter</a:t>
             </a:r>
           </a:p>
         </p:txBody>
@@ -17650,8 +18734,8 @@
         </p:nvSpPr>
         <p:spPr>
           <a:xfrm>
-            <a:off x="2121408" y="3904488"/>
-            <a:ext cx="2240280" cy="960120"/>
+            <a:off x="2258568" y="3273552"/>
+            <a:ext cx="2148840" cy="749808"/>
           </a:xfrm>
           <a:prstGeom prst="rect">
             <a:avLst/>
@@ -17696,8 +18780,8 @@
         </p:nvSpPr>
         <p:spPr>
           <a:xfrm>
-            <a:off x="2194560" y="3941064"/>
-            <a:ext cx="2093976" cy="905256"/>
+            <a:off x="2331720" y="3310128"/>
+            <a:ext cx="2002536" cy="694944"/>
           </a:xfrm>
           <a:prstGeom prst="rect">
             <a:avLst/>
@@ -17717,34 +18801,34 @@
               </a:spcAft>
             </a:pPr>
             <a:r>
-              <a:rPr sz="1200" b="0">
+              <a:rPr sz="1100" b="0">
                 <a:solidFill>
                   <a:srgbClr val="111111"/>
                 </a:solidFill>
                 <a:latin typeface="PingFang SC"/>
                 <a:ea typeface="PingFang SC"/>
               </a:rPr>
-              <a:t>能被搜到。</a:t>
-            </a:r>
-          </a:p>
-          <a:p>
-            <a:pPr algn="l">
-              <a:spcBef>
-                <a:spcPts val="0"/>
-              </a:spcBef>
-              <a:spcAft>
-                <a:spcPts val="0"/>
-              </a:spcAft>
-            </a:pPr>
-            <a:r>
-              <a:rPr sz="1200" b="0">
+              <a:t>两家跑通再开</a:t>
+            </a:r>
+          </a:p>
+          <a:p>
+            <a:pPr algn="l">
+              <a:spcBef>
+                <a:spcPts val="0"/>
+              </a:spcBef>
+              <a:spcAft>
+                <a:spcPts val="0"/>
+              </a:spcAft>
+            </a:pPr>
+            <a:r>
+              <a:rPr sz="1100" b="0">
                 <a:solidFill>
                   <a:srgbClr val="111111"/>
                 </a:solidFill>
                 <a:latin typeface="PingFang SC"/>
                 <a:ea typeface="PingFang SC"/>
               </a:rPr>
-              <a:t>官网和邮件都嵌。</a:t>
+              <a:t>图文与行业动态</a:t>
             </a:r>
           </a:p>
         </p:txBody>
@@ -17757,8 +18841,8 @@
         </p:nvSpPr>
         <p:spPr>
           <a:xfrm>
-            <a:off x="4361688" y="3904488"/>
-            <a:ext cx="3154680" cy="960120"/>
+            <a:off x="4407408" y="3273552"/>
+            <a:ext cx="3063240" cy="749808"/>
           </a:xfrm>
           <a:prstGeom prst="rect">
             <a:avLst/>
@@ -17803,8 +18887,8 @@
         </p:nvSpPr>
         <p:spPr>
           <a:xfrm>
-            <a:off x="4434840" y="3941064"/>
-            <a:ext cx="3008376" cy="905256"/>
+            <a:off x="4480560" y="3310128"/>
+            <a:ext cx="2916936" cy="694944"/>
           </a:xfrm>
           <a:prstGeom prst="rect">
             <a:avLst/>
@@ -17824,34 +18908,34 @@
               </a:spcAft>
             </a:pPr>
             <a:r>
-              <a:rPr sz="1200" b="0">
+              <a:rPr sz="1100" b="0">
                 <a:solidFill>
                   <a:srgbClr val="111111"/>
                 </a:solidFill>
                 <a:latin typeface="PingFang SC"/>
                 <a:ea typeface="PingFang SC"/>
               </a:rPr>
-              <a:t>60 秒系统片 + SCORE / LED</a:t>
-            </a:r>
-          </a:p>
-          <a:p>
-            <a:pPr algn="l">
-              <a:spcBef>
-                <a:spcPts val="0"/>
-              </a:spcBef>
-              <a:spcAft>
-                <a:spcPts val="0"/>
-              </a:spcAft>
-            </a:pPr>
-            <a:r>
-              <a:rPr sz="1200" b="0">
+              <a:t>一句现场、一张图、一个链。</a:t>
+            </a:r>
+          </a:p>
+          <a:p>
+            <a:pPr algn="l">
+              <a:spcBef>
+                <a:spcPts val="0"/>
+              </a:spcBef>
+              <a:spcAft>
+                <a:spcPts val="0"/>
+              </a:spcAft>
+            </a:pPr>
+            <a:r>
+              <a:rPr sz="1100" b="0">
                 <a:solidFill>
                   <a:srgbClr val="111111"/>
                 </a:solidFill>
                 <a:latin typeface="PingFang SC"/>
                 <a:ea typeface="PingFang SC"/>
               </a:rPr>
-              <a:t>各一支 30 秒。</a:t>
+              <a:t>对标 Stramatel：装机与比赛夜。</a:t>
             </a:r>
           </a:p>
         </p:txBody>
@@ -17864,8 +18948,8 @@
         </p:nvSpPr>
         <p:spPr>
           <a:xfrm>
-            <a:off x="7516368" y="3904488"/>
-            <a:ext cx="1828800" cy="960120"/>
+            <a:off x="7470648" y="3273552"/>
+            <a:ext cx="1965960" cy="749808"/>
           </a:xfrm>
           <a:prstGeom prst="rect">
             <a:avLst/>
@@ -17910,8 +18994,8 @@
         </p:nvSpPr>
         <p:spPr>
           <a:xfrm>
-            <a:off x="7589520" y="3941064"/>
-            <a:ext cx="1682496" cy="905256"/>
+            <a:off x="7543800" y="3310128"/>
+            <a:ext cx="1819656" cy="694944"/>
           </a:xfrm>
           <a:prstGeom prst="rect">
             <a:avLst/>
@@ -17931,14 +19015,14 @@
               </a:spcAft>
             </a:pPr>
             <a:r>
-              <a:rPr sz="1200" b="0">
+              <a:rPr sz="1100" b="0">
                 <a:solidFill>
                   <a:srgbClr val="111111"/>
                 </a:solidFill>
                 <a:latin typeface="PingFang SC"/>
                 <a:ea typeface="PingFang SC"/>
               </a:rPr>
-              <a:t>2 条/月</a:t>
+              <a:t>有事才发</a:t>
             </a:r>
           </a:p>
         </p:txBody>
@@ -17951,8 +19035,8 @@
         </p:nvSpPr>
         <p:spPr>
           <a:xfrm>
-            <a:off x="9345168" y="3904488"/>
-            <a:ext cx="2240280" cy="960120"/>
+            <a:off x="9436608" y="3273552"/>
+            <a:ext cx="2148840" cy="749808"/>
           </a:xfrm>
           <a:prstGeom prst="rect">
             <a:avLst/>
@@ -17997,8 +19081,8 @@
         </p:nvSpPr>
         <p:spPr>
           <a:xfrm>
-            <a:off x="9418320" y="3941064"/>
-            <a:ext cx="2093976" cy="905256"/>
+            <a:off x="9509760" y="3310128"/>
+            <a:ext cx="2002536" cy="694944"/>
           </a:xfrm>
           <a:prstGeom prst="rect">
             <a:avLst/>
@@ -18018,34 +19102,14 @@
               </a:spcAft>
             </a:pPr>
             <a:r>
-              <a:rPr sz="1200" b="0">
+              <a:rPr sz="1100" b="0">
                 <a:solidFill>
                   <a:srgbClr val="111111"/>
                 </a:solidFill>
                 <a:latin typeface="PingFang SC"/>
                 <a:ea typeface="PingFang SC"/>
               </a:rPr>
-              <a:t>Jürg 定调</a:t>
-            </a:r>
-          </a:p>
-          <a:p>
-            <a:pPr algn="l">
-              <a:spcBef>
-                <a:spcPts val="0"/>
-              </a:spcBef>
-              <a:spcAft>
-                <a:spcPts val="0"/>
-              </a:spcAft>
-            </a:pPr>
-            <a:r>
-              <a:rPr sz="1200" b="0">
-                <a:solidFill>
-                  <a:srgbClr val="111111"/>
-                </a:solidFill>
-                <a:latin typeface="PingFang SC"/>
-                <a:ea typeface="PingFang SC"/>
-              </a:rPr>
-              <a:t>Donglin 协助</a:t>
+              <a:t>Peter</a:t>
             </a:r>
           </a:p>
         </p:txBody>
@@ -18058,7 +19122,502 @@
         </p:nvSpPr>
         <p:spPr>
           <a:xfrm>
-            <a:off x="566928" y="5010912"/>
+            <a:off x="566928" y="4023360"/>
+            <a:ext cx="1691640" cy="749808"/>
+          </a:xfrm>
+          <a:prstGeom prst="rect">
+            <a:avLst/>
+          </a:prstGeom>
+          <a:solidFill>
+            <a:srgbClr val="FFFFFF"/>
+          </a:solidFill>
+          <a:ln w="9525">
+            <a:solidFill>
+              <a:srgbClr val="E6E6E6"/>
+            </a:solidFill>
+          </a:ln>
+          <a:effectLst/>
+        </p:spPr>
+        <p:style>
+          <a:lnRef idx="1">
+            <a:schemeClr val="accent1"/>
+          </a:lnRef>
+          <a:fillRef idx="3">
+            <a:schemeClr val="accent1"/>
+          </a:fillRef>
+          <a:effectRef idx="2">
+            <a:schemeClr val="accent1"/>
+          </a:effectRef>
+          <a:fontRef idx="minor">
+            <a:schemeClr val="lt1"/>
+          </a:fontRef>
+        </p:style>
+        <p:txBody>
+          <a:bodyPr rtlCol="0" anchor="ctr"/>
+          <a:lstStyle/>
+          <a:p>
+            <a:pPr algn="ctr"/>
+          </a:p>
+        </p:txBody>
+      </p:sp>
+      <p:sp>
+        <p:nvSpPr>
+          <p:cNvPr id="47" name="TextBox 46"/>
+          <p:cNvSpPr txBox="1"/>
+          <p:nvPr/>
+        </p:nvSpPr>
+        <p:spPr>
+          <a:xfrm>
+            <a:off x="640080" y="4059936"/>
+            <a:ext cx="1545336" cy="694944"/>
+          </a:xfrm>
+          <a:prstGeom prst="rect">
+            <a:avLst/>
+          </a:prstGeom>
+          <a:noFill/>
+        </p:spPr>
+        <p:txBody>
+          <a:bodyPr wrap="square" anchor="ctr"/>
+          <a:lstStyle/>
+          <a:p>
+            <a:pPr algn="l">
+              <a:spcBef>
+                <a:spcPts val="0"/>
+              </a:spcBef>
+              <a:spcAft>
+                <a:spcPts val="0"/>
+              </a:spcAft>
+            </a:pPr>
+            <a:r>
+              <a:rPr sz="1100" b="1">
+                <a:solidFill>
+                  <a:srgbClr val="111111"/>
+                </a:solidFill>
+                <a:latin typeface="PingFang SC"/>
+                <a:ea typeface="PingFang SC"/>
+              </a:rPr>
+              <a:t>YouTube</a:t>
+            </a:r>
+          </a:p>
+        </p:txBody>
+      </p:sp>
+      <p:sp>
+        <p:nvSpPr>
+          <p:cNvPr id="48" name="Rectangle 47"/>
+          <p:cNvSpPr/>
+          <p:nvPr/>
+        </p:nvSpPr>
+        <p:spPr>
+          <a:xfrm>
+            <a:off x="2258568" y="4023360"/>
+            <a:ext cx="2148840" cy="749808"/>
+          </a:xfrm>
+          <a:prstGeom prst="rect">
+            <a:avLst/>
+          </a:prstGeom>
+          <a:solidFill>
+            <a:srgbClr val="FFFFFF"/>
+          </a:solidFill>
+          <a:ln w="9525">
+            <a:solidFill>
+              <a:srgbClr val="E6E6E6"/>
+            </a:solidFill>
+          </a:ln>
+          <a:effectLst/>
+        </p:spPr>
+        <p:style>
+          <a:lnRef idx="1">
+            <a:schemeClr val="accent1"/>
+          </a:lnRef>
+          <a:fillRef idx="3">
+            <a:schemeClr val="accent1"/>
+          </a:fillRef>
+          <a:effectRef idx="2">
+            <a:schemeClr val="accent1"/>
+          </a:effectRef>
+          <a:fontRef idx="minor">
+            <a:schemeClr val="lt1"/>
+          </a:fontRef>
+        </p:style>
+        <p:txBody>
+          <a:bodyPr rtlCol="0" anchor="ctr"/>
+          <a:lstStyle/>
+          <a:p>
+            <a:pPr algn="ctr"/>
+          </a:p>
+        </p:txBody>
+      </p:sp>
+      <p:sp>
+        <p:nvSpPr>
+          <p:cNvPr id="49" name="TextBox 48"/>
+          <p:cNvSpPr txBox="1"/>
+          <p:nvPr/>
+        </p:nvSpPr>
+        <p:spPr>
+          <a:xfrm>
+            <a:off x="2331720" y="4059936"/>
+            <a:ext cx="2002536" cy="694944"/>
+          </a:xfrm>
+          <a:prstGeom prst="rect">
+            <a:avLst/>
+          </a:prstGeom>
+          <a:noFill/>
+        </p:spPr>
+        <p:txBody>
+          <a:bodyPr wrap="square" anchor="ctr"/>
+          <a:lstStyle/>
+          <a:p>
+            <a:pPr algn="l">
+              <a:spcBef>
+                <a:spcPts val="0"/>
+              </a:spcBef>
+              <a:spcAft>
+                <a:spcPts val="0"/>
+              </a:spcAft>
+            </a:pPr>
+            <a:r>
+              <a:rPr sz="1100" b="0">
+                <a:solidFill>
+                  <a:srgbClr val="111111"/>
+                </a:solidFill>
+                <a:latin typeface="PingFang SC"/>
+                <a:ea typeface="PingFang SC"/>
+              </a:rPr>
+              <a:t>两家跑通再开</a:t>
+            </a:r>
+          </a:p>
+          <a:p>
+            <a:pPr algn="l">
+              <a:spcBef>
+                <a:spcPts val="0"/>
+              </a:spcBef>
+              <a:spcAft>
+                <a:spcPts val="0"/>
+              </a:spcAft>
+            </a:pPr>
+            <a:r>
+              <a:rPr sz="1100" b="0">
+                <a:solidFill>
+                  <a:srgbClr val="111111"/>
+                </a:solidFill>
+                <a:latin typeface="PingFang SC"/>
+                <a:ea typeface="PingFang SC"/>
+              </a:rPr>
+              <a:t>可被搜到</a:t>
+            </a:r>
+          </a:p>
+        </p:txBody>
+      </p:sp>
+      <p:sp>
+        <p:nvSpPr>
+          <p:cNvPr id="50" name="Rectangle 49"/>
+          <p:cNvSpPr/>
+          <p:nvPr/>
+        </p:nvSpPr>
+        <p:spPr>
+          <a:xfrm>
+            <a:off x="4407408" y="4023360"/>
+            <a:ext cx="3063240" cy="749808"/>
+          </a:xfrm>
+          <a:prstGeom prst="rect">
+            <a:avLst/>
+          </a:prstGeom>
+          <a:solidFill>
+            <a:srgbClr val="FFFFFF"/>
+          </a:solidFill>
+          <a:ln w="9525">
+            <a:solidFill>
+              <a:srgbClr val="E6E6E6"/>
+            </a:solidFill>
+          </a:ln>
+          <a:effectLst/>
+        </p:spPr>
+        <p:style>
+          <a:lnRef idx="1">
+            <a:schemeClr val="accent1"/>
+          </a:lnRef>
+          <a:fillRef idx="3">
+            <a:schemeClr val="accent1"/>
+          </a:fillRef>
+          <a:effectRef idx="2">
+            <a:schemeClr val="accent1"/>
+          </a:effectRef>
+          <a:fontRef idx="minor">
+            <a:schemeClr val="lt1"/>
+          </a:fontRef>
+        </p:style>
+        <p:txBody>
+          <a:bodyPr rtlCol="0" anchor="ctr"/>
+          <a:lstStyle/>
+          <a:p>
+            <a:pPr algn="ctr"/>
+          </a:p>
+        </p:txBody>
+      </p:sp>
+      <p:sp>
+        <p:nvSpPr>
+          <p:cNvPr id="51" name="TextBox 50"/>
+          <p:cNvSpPr txBox="1"/>
+          <p:nvPr/>
+        </p:nvSpPr>
+        <p:spPr>
+          <a:xfrm>
+            <a:off x="4480560" y="4059936"/>
+            <a:ext cx="2916936" cy="694944"/>
+          </a:xfrm>
+          <a:prstGeom prst="rect">
+            <a:avLst/>
+          </a:prstGeom>
+          <a:noFill/>
+        </p:spPr>
+        <p:txBody>
+          <a:bodyPr wrap="square" anchor="ctr"/>
+          <a:lstStyle/>
+          <a:p>
+            <a:pPr algn="l">
+              <a:spcBef>
+                <a:spcPts val="0"/>
+              </a:spcBef>
+              <a:spcAft>
+                <a:spcPts val="0"/>
+              </a:spcAft>
+            </a:pPr>
+            <a:r>
+              <a:rPr sz="1100" b="0">
+                <a:solidFill>
+                  <a:srgbClr val="111111"/>
+                </a:solidFill>
+                <a:latin typeface="PingFang SC"/>
+                <a:ea typeface="PingFang SC"/>
+              </a:rPr>
+              <a:t>7 秒 SCORE + 60 秒系统片</a:t>
+            </a:r>
+          </a:p>
+          <a:p>
+            <a:pPr algn="l">
+              <a:spcBef>
+                <a:spcPts val="0"/>
+              </a:spcBef>
+              <a:spcAft>
+                <a:spcPts val="0"/>
+              </a:spcAft>
+            </a:pPr>
+            <a:r>
+              <a:rPr sz="1100" b="0">
+                <a:solidFill>
+                  <a:srgbClr val="111111"/>
+                </a:solidFill>
+                <a:latin typeface="PingFang SC"/>
+                <a:ea typeface="PingFang SC"/>
+              </a:rPr>
+              <a:t>+ 教程长视频。</a:t>
+            </a:r>
+          </a:p>
+        </p:txBody>
+      </p:sp>
+      <p:sp>
+        <p:nvSpPr>
+          <p:cNvPr id="52" name="Rectangle 51"/>
+          <p:cNvSpPr/>
+          <p:nvPr/>
+        </p:nvSpPr>
+        <p:spPr>
+          <a:xfrm>
+            <a:off x="7470648" y="4023360"/>
+            <a:ext cx="1965960" cy="749808"/>
+          </a:xfrm>
+          <a:prstGeom prst="rect">
+            <a:avLst/>
+          </a:prstGeom>
+          <a:solidFill>
+            <a:srgbClr val="FFFFFF"/>
+          </a:solidFill>
+          <a:ln w="9525">
+            <a:solidFill>
+              <a:srgbClr val="E6E6E6"/>
+            </a:solidFill>
+          </a:ln>
+          <a:effectLst/>
+        </p:spPr>
+        <p:style>
+          <a:lnRef idx="1">
+            <a:schemeClr val="accent1"/>
+          </a:lnRef>
+          <a:fillRef idx="3">
+            <a:schemeClr val="accent1"/>
+          </a:fillRef>
+          <a:effectRef idx="2">
+            <a:schemeClr val="accent1"/>
+          </a:effectRef>
+          <a:fontRef idx="minor">
+            <a:schemeClr val="lt1"/>
+          </a:fontRef>
+        </p:style>
+        <p:txBody>
+          <a:bodyPr rtlCol="0" anchor="ctr"/>
+          <a:lstStyle/>
+          <a:p>
+            <a:pPr algn="ctr"/>
+          </a:p>
+        </p:txBody>
+      </p:sp>
+      <p:sp>
+        <p:nvSpPr>
+          <p:cNvPr id="53" name="TextBox 52"/>
+          <p:cNvSpPr txBox="1"/>
+          <p:nvPr/>
+        </p:nvSpPr>
+        <p:spPr>
+          <a:xfrm>
+            <a:off x="7543800" y="4059936"/>
+            <a:ext cx="1819656" cy="694944"/>
+          </a:xfrm>
+          <a:prstGeom prst="rect">
+            <a:avLst/>
+          </a:prstGeom>
+          <a:noFill/>
+        </p:spPr>
+        <p:txBody>
+          <a:bodyPr wrap="square" anchor="ctr"/>
+          <a:lstStyle/>
+          <a:p>
+            <a:pPr algn="l">
+              <a:spcBef>
+                <a:spcPts val="0"/>
+              </a:spcBef>
+              <a:spcAft>
+                <a:spcPts val="0"/>
+              </a:spcAft>
+            </a:pPr>
+            <a:r>
+              <a:rPr sz="1100" b="0">
+                <a:solidFill>
+                  <a:srgbClr val="111111"/>
+                </a:solidFill>
+                <a:latin typeface="PingFang SC"/>
+                <a:ea typeface="PingFang SC"/>
+              </a:rPr>
+              <a:t>2 条/月</a:t>
+            </a:r>
+          </a:p>
+        </p:txBody>
+      </p:sp>
+      <p:sp>
+        <p:nvSpPr>
+          <p:cNvPr id="54" name="Rectangle 53"/>
+          <p:cNvSpPr/>
+          <p:nvPr/>
+        </p:nvSpPr>
+        <p:spPr>
+          <a:xfrm>
+            <a:off x="9436608" y="4023360"/>
+            <a:ext cx="2148840" cy="749808"/>
+          </a:xfrm>
+          <a:prstGeom prst="rect">
+            <a:avLst/>
+          </a:prstGeom>
+          <a:solidFill>
+            <a:srgbClr val="FFFFFF"/>
+          </a:solidFill>
+          <a:ln w="9525">
+            <a:solidFill>
+              <a:srgbClr val="E6E6E6"/>
+            </a:solidFill>
+          </a:ln>
+          <a:effectLst/>
+        </p:spPr>
+        <p:style>
+          <a:lnRef idx="1">
+            <a:schemeClr val="accent1"/>
+          </a:lnRef>
+          <a:fillRef idx="3">
+            <a:schemeClr val="accent1"/>
+          </a:fillRef>
+          <a:effectRef idx="2">
+            <a:schemeClr val="accent1"/>
+          </a:effectRef>
+          <a:fontRef idx="minor">
+            <a:schemeClr val="lt1"/>
+          </a:fontRef>
+        </p:style>
+        <p:txBody>
+          <a:bodyPr rtlCol="0" anchor="ctr"/>
+          <a:lstStyle/>
+          <a:p>
+            <a:pPr algn="ctr"/>
+          </a:p>
+        </p:txBody>
+      </p:sp>
+      <p:sp>
+        <p:nvSpPr>
+          <p:cNvPr id="55" name="TextBox 54"/>
+          <p:cNvSpPr txBox="1"/>
+          <p:nvPr/>
+        </p:nvSpPr>
+        <p:spPr>
+          <a:xfrm>
+            <a:off x="9509760" y="4059936"/>
+            <a:ext cx="2002536" cy="694944"/>
+          </a:xfrm>
+          <a:prstGeom prst="rect">
+            <a:avLst/>
+          </a:prstGeom>
+          <a:noFill/>
+        </p:spPr>
+        <p:txBody>
+          <a:bodyPr wrap="square" anchor="ctr"/>
+          <a:lstStyle/>
+          <a:p>
+            <a:pPr algn="l">
+              <a:spcBef>
+                <a:spcPts val="0"/>
+              </a:spcBef>
+              <a:spcAft>
+                <a:spcPts val="0"/>
+              </a:spcAft>
+            </a:pPr>
+            <a:r>
+              <a:rPr sz="1100" b="0">
+                <a:solidFill>
+                  <a:srgbClr val="111111"/>
+                </a:solidFill>
+                <a:latin typeface="PingFang SC"/>
+                <a:ea typeface="PingFang SC"/>
+              </a:rPr>
+              <a:t>Jürg</a:t>
+            </a:r>
+          </a:p>
+          <a:p>
+            <a:pPr algn="l">
+              <a:spcBef>
+                <a:spcPts val="0"/>
+              </a:spcBef>
+              <a:spcAft>
+                <a:spcPts val="0"/>
+              </a:spcAft>
+            </a:pPr>
+            <a:r>
+              <a:rPr sz="1100" b="0">
+                <a:solidFill>
+                  <a:srgbClr val="111111"/>
+                </a:solidFill>
+                <a:latin typeface="PingFang SC"/>
+                <a:ea typeface="PingFang SC"/>
+              </a:rPr>
+              <a:t>Donglin</a:t>
+            </a:r>
+          </a:p>
+        </p:txBody>
+      </p:sp>
+      <p:sp>
+        <p:nvSpPr>
+          <p:cNvPr id="56" name="Rectangle 55"/>
+          <p:cNvSpPr/>
+          <p:nvPr/>
+        </p:nvSpPr>
+        <p:spPr>
+          <a:xfrm>
+            <a:off x="566928" y="4919472"/>
             <a:ext cx="11045952" cy="658368"/>
           </a:xfrm>
           <a:prstGeom prst="rect">
@@ -18096,13 +19655,13 @@
       </p:sp>
       <p:sp>
         <p:nvSpPr>
-          <p:cNvPr id="47" name="TextBox 46"/>
-          <p:cNvSpPr txBox="1"/>
-          <p:nvPr/>
-        </p:nvSpPr>
-        <p:spPr>
-          <a:xfrm>
-            <a:off x="749808" y="5102352"/>
+          <p:cNvPr id="57" name="TextBox 56"/>
+          <p:cNvSpPr txBox="1"/>
+          <p:nvPr/>
+        </p:nvSpPr>
+        <p:spPr>
+          <a:xfrm>
+            <a:off x="749808" y="5010912"/>
             <a:ext cx="10698480" cy="475488"/>
           </a:xfrm>
           <a:prstGeom prst="rect">
@@ -18130,21 +19689,21 @@
                 <a:latin typeface="PingFang SC"/>
                 <a:ea typeface="PingFang SC"/>
               </a:rPr>
-              <a:t>三支片子循环用：A 60 秒系统片（10/20 交，用手球 intro 延伸）· B 30 秒 SCORE · C 30 秒 LED。官网、邮件、展会、经销商包同一套。</a:t>
-            </a:r>
-          </a:p>
-        </p:txBody>
-      </p:sp>
-      <p:sp>
-        <p:nvSpPr>
-          <p:cNvPr id="48" name="TextBox 47"/>
-          <p:cNvSpPr txBox="1"/>
-          <p:nvPr/>
-        </p:nvSpPr>
-        <p:spPr>
-          <a:xfrm>
-            <a:off x="566928" y="5779008"/>
-            <a:ext cx="11064240" cy="530352"/>
+              <a:t>注册：买一个全新瑞士手机号，账号不绑私人号。热点只蹭职业比赛夜和展会周，不蹭 iPhone 级消费发布会。</a:t>
+            </a:r>
+          </a:p>
+        </p:txBody>
+      </p:sp>
+      <p:sp>
+        <p:nvSpPr>
+          <p:cNvPr id="58" name="TextBox 57"/>
+          <p:cNvSpPr txBox="1"/>
+          <p:nvPr/>
+        </p:nvSpPr>
+        <p:spPr>
+          <a:xfrm>
+            <a:off x="566928" y="5687568"/>
+            <a:ext cx="11064240" cy="621792"/>
           </a:xfrm>
           <a:prstGeom prst="rect">
             <a:avLst/>
@@ -18171,14 +19730,14 @@
                 <a:latin typeface="PingFang SC"/>
                 <a:ea typeface="PingFang SC"/>
               </a:rPr>
-              <a:t>不做：TikTok、Pinterest、小红书对欧洲获客、Facebook 日常。账号可以占着，不排期、不考核。</a:t>
-            </a:r>
-          </a:p>
-        </p:txBody>
-      </p:sp>
-      <p:sp>
-        <p:nvSpPr>
-          <p:cNvPr id="49" name="TextBox 48"/>
+              <a:t>Facebook 只做竞品观察，不日常运营。TikTok / 小红书不对欧洲获客。文案可用 AI 起草，人必须改完再发。</a:t>
+            </a:r>
+          </a:p>
+        </p:txBody>
+      </p:sp>
+      <p:sp>
+        <p:nvSpPr>
+          <p:cNvPr id="59" name="TextBox 58"/>
           <p:cNvSpPr txBox="1"/>
           <p:nvPr/>
         </p:nvSpPr>
@@ -18219,7 +19778,7 @@
       </p:sp>
       <p:sp>
         <p:nvSpPr>
-          <p:cNvPr id="50" name="TextBox 49"/>
+          <p:cNvPr id="60" name="TextBox 59"/>
           <p:cNvSpPr txBox="1"/>
           <p:nvPr/>
         </p:nvSpPr>
@@ -18253,14 +19812,14 @@
                 <a:latin typeface="PingFang SC"/>
                 <a:ea typeface="PingFang SC"/>
               </a:rPr>
-              <a:t>6 / 11</a:t>
-            </a:r>
-          </a:p>
-        </p:txBody>
-      </p:sp>
-      <p:sp>
-        <p:nvSpPr>
-          <p:cNvPr id="51" name="Rectangle 50"/>
+              <a:t>6 / 12</a:t>
+            </a:r>
+          </a:p>
+        </p:txBody>
+      </p:sp>
+      <p:sp>
+        <p:nvSpPr>
+          <p:cNvPr id="61" name="Rectangle 60"/>
           <p:cNvSpPr/>
           <p:nvPr/>
         </p:nvSpPr>
@@ -19612,7 +21171,7 @@
                 <a:latin typeface="PingFang SC"/>
                 <a:ea typeface="PingFang SC"/>
               </a:rPr>
-              <a:t>7 / 11</a:t>
+              <a:t>7 / 12</a:t>
             </a:r>
           </a:p>
         </p:txBody>
@@ -20556,7 +22115,7 @@
                 <a:latin typeface="PingFang SC"/>
                 <a:ea typeface="PingFang SC"/>
               </a:rPr>
-              <a:t>8 / 11</a:t>
+              <a:t>8 / 12</a:t>
             </a:r>
           </a:p>
         </p:txBody>
@@ -24000,7 +25559,7 @@
                 <a:latin typeface="PingFang SC"/>
                 <a:ea typeface="PingFang SC"/>
               </a:rPr>
-              <a:t>9 / 11</a:t>
+              <a:t>9 / 12</a:t>
             </a:r>
           </a:p>
         </p:txBody>
